--- a/Results/ML.pptx
+++ b/Results/ML.pptx
@@ -7086,9 +7086,704 @@
           </a:prstGeom>
         </p:spPr>
       </p:pic>
+      <p:sp>
+        <p:nvSpPr>
+          <p:cNvPr id="20" name="Shape 16"/>
+          <p:cNvSpPr/>
+          <p:nvPr/>
+        </p:nvSpPr>
+        <p:spPr>
+          <a:xfrm>
+            <a:off x="4800600" y="4663440"/>
+            <a:ext cx="6812280" cy="1627632"/>
+          </a:xfrm>
+          <a:prstGeom prst="roundRect">
+            <a:avLst>
+              <a:gd name="adj" fmla="val 4494"/>
+            </a:avLst>
+          </a:prstGeom>
+          <a:solidFill>
+            <a:srgbClr val="FFFFFF"/>
+          </a:solidFill>
+          <a:ln/>
+          <a:effectLst>
+            <a:outerShdw blurRad="88900" dist="38100" dir="5400000" algn="bl" rotWithShape="0">
+              <a:srgbClr val="000000">
+                <a:alpha val="13000"/>
+              </a:srgbClr>
+            </a:outerShdw>
+          </a:effectLst>
+        </p:spPr>
+        <p:txBody>
+          <a:bodyPr/>
+          <a:lstStyle/>
+          <a:p>
+            <a:endParaRPr lang="en-US"/>
+          </a:p>
+        </p:txBody>
+      </p:sp>
+      <p:sp>
+        <p:nvSpPr>
+          <p:cNvPr id="21" name="Text 17"/>
+          <p:cNvSpPr/>
+          <p:nvPr/>
+        </p:nvSpPr>
+        <p:spPr>
+          <a:xfrm>
+            <a:off x="5029200" y="4828032"/>
+            <a:ext cx="2194560" cy="274320"/>
+          </a:xfrm>
+          <a:prstGeom prst="rect">
+            <a:avLst/>
+          </a:prstGeom>
+          <a:noFill/>
+          <a:ln/>
+        </p:spPr>
+        <p:txBody>
+          <a:bodyPr wrap="square" lIns="0" tIns="0" rIns="0" bIns="0" rtlCol="0" anchor="ctr"/>
+          <a:lstStyle/>
+          <a:p>
+            <a:pPr marL="0" indent="0">
+              <a:buNone/>
+            </a:pPr>
+            <a:r>
+              <a:rPr lang="en-US" sz="1100" b="1" dirty="0">
+                <a:solidFill>
+                  <a:srgbClr val="64748B"/>
+                </a:solidFill>
+                <a:latin typeface="Calibri" pitchFamily="34" charset="0"/>
+                <a:ea typeface="Calibri" pitchFamily="34" charset="-122"/>
+                <a:cs typeface="Calibri" pitchFamily="34" charset="-120"/>
+              </a:rPr>
+              <a:t>LOSO (cross-subject)</a:t>
+            </a:r>
+            <a:endParaRPr lang="en-US" sz="1100" dirty="0"/>
+          </a:p>
+        </p:txBody>
+      </p:sp>
+      <p:sp>
+        <p:nvSpPr>
+          <p:cNvPr id="22" name="Text 18"/>
+          <p:cNvSpPr/>
+          <p:nvPr/>
+        </p:nvSpPr>
+        <p:spPr>
+          <a:xfrm>
+            <a:off x="5029200" y="5074920"/>
+            <a:ext cx="2194560" cy="457200"/>
+          </a:xfrm>
+          <a:prstGeom prst="rect">
+            <a:avLst/>
+          </a:prstGeom>
+          <a:noFill/>
+          <a:ln/>
+        </p:spPr>
+        <p:txBody>
+          <a:bodyPr wrap="square" lIns="0" tIns="0" rIns="0" bIns="0" rtlCol="0" anchor="ctr"/>
+          <a:lstStyle/>
+          <a:p>
+            <a:pPr marL="0" indent="0">
+              <a:buNone/>
+            </a:pPr>
+            <a:r>
+              <a:rPr lang="en-US" sz="2100" b="1" dirty="0">
+                <a:solidFill>
+                  <a:srgbClr val="1C7293"/>
+                </a:solidFill>
+                <a:latin typeface="Cambria" pitchFamily="34" charset="0"/>
+                <a:ea typeface="Cambria" pitchFamily="34" charset="-122"/>
+                <a:cs typeface="Cambria" pitchFamily="34" charset="-120"/>
+              </a:rPr>
+              <a:t>57.8 / 58.3 / 61.7</a:t>
+            </a:r>
+            <a:endParaRPr lang="en-US" sz="2100" dirty="0"/>
+          </a:p>
+        </p:txBody>
+      </p:sp>
+      <p:sp>
+        <p:nvSpPr>
+          <p:cNvPr id="23" name="Text 19"/>
+          <p:cNvSpPr/>
+          <p:nvPr/>
+        </p:nvSpPr>
+        <p:spPr>
+          <a:xfrm>
+            <a:off x="5029200" y="5532120"/>
+            <a:ext cx="2194560" cy="274320"/>
+          </a:xfrm>
+          <a:prstGeom prst="rect">
+            <a:avLst/>
+          </a:prstGeom>
+          <a:noFill/>
+          <a:ln/>
+        </p:spPr>
+        <p:txBody>
+          <a:bodyPr wrap="square" lIns="0" tIns="0" rIns="0" bIns="0" rtlCol="0" anchor="ctr"/>
+          <a:lstStyle/>
+          <a:p>
+            <a:pPr marL="0" indent="0">
+              <a:buNone/>
+            </a:pPr>
+            <a:r>
+              <a:rPr lang="en-US" sz="950" dirty="0">
+                <a:solidFill>
+                  <a:srgbClr val="64748B"/>
+                </a:solidFill>
+                <a:latin typeface="Calibri" pitchFamily="34" charset="0"/>
+                <a:ea typeface="Calibri" pitchFamily="34" charset="-122"/>
+                <a:cs typeface="Calibri" pitchFamily="34" charset="-120"/>
+              </a:rPr>
+              <a:t>ERP / BP / Combined %</a:t>
+            </a:r>
+            <a:endParaRPr lang="en-US" sz="950" dirty="0"/>
+          </a:p>
+        </p:txBody>
+      </p:sp>
+      <p:sp>
+        <p:nvSpPr>
+          <p:cNvPr id="24" name="Text 20"/>
+          <p:cNvSpPr/>
+          <p:nvPr/>
+        </p:nvSpPr>
+        <p:spPr>
+          <a:xfrm>
+            <a:off x="7360920" y="4828032"/>
+            <a:ext cx="2194560" cy="274320"/>
+          </a:xfrm>
+          <a:prstGeom prst="rect">
+            <a:avLst/>
+          </a:prstGeom>
+          <a:noFill/>
+          <a:ln/>
+        </p:spPr>
+        <p:txBody>
+          <a:bodyPr wrap="square" lIns="0" tIns="0" rIns="0" bIns="0" rtlCol="0" anchor="ctr"/>
+          <a:lstStyle/>
+          <a:p>
+            <a:pPr marL="0" indent="0">
+              <a:buNone/>
+            </a:pPr>
+            <a:r>
+              <a:rPr lang="en-US" sz="1100" b="1" dirty="0">
+                <a:solidFill>
+                  <a:srgbClr val="64748B"/>
+                </a:solidFill>
+                <a:latin typeface="Calibri" pitchFamily="34" charset="0"/>
+                <a:ea typeface="Calibri" pitchFamily="34" charset="-122"/>
+                <a:cs typeface="Calibri" pitchFamily="34" charset="-120"/>
+              </a:rPr>
+              <a:t>Within-subject</a:t>
+            </a:r>
+            <a:endParaRPr lang="en-US" sz="1100" dirty="0"/>
+          </a:p>
+        </p:txBody>
+      </p:sp>
+      <p:sp>
+        <p:nvSpPr>
+          <p:cNvPr id="25" name="Text 21"/>
+          <p:cNvSpPr/>
+          <p:nvPr/>
+        </p:nvSpPr>
+        <p:spPr>
+          <a:xfrm>
+            <a:off x="7360920" y="5074920"/>
+            <a:ext cx="2194560" cy="457200"/>
+          </a:xfrm>
+          <a:prstGeom prst="rect">
+            <a:avLst/>
+          </a:prstGeom>
+          <a:noFill/>
+          <a:ln/>
+        </p:spPr>
+        <p:txBody>
+          <a:bodyPr wrap="square" lIns="0" tIns="0" rIns="0" bIns="0" rtlCol="0" anchor="ctr"/>
+          <a:lstStyle/>
+          <a:p>
+            <a:pPr marL="0" indent="0">
+              <a:buNone/>
+            </a:pPr>
+            <a:r>
+              <a:rPr lang="en-US" sz="2100" b="1" dirty="0">
+                <a:solidFill>
+                  <a:srgbClr val="21295C"/>
+                </a:solidFill>
+                <a:latin typeface="Cambria" pitchFamily="34" charset="0"/>
+                <a:ea typeface="Cambria" pitchFamily="34" charset="-122"/>
+                <a:cs typeface="Cambria" pitchFamily="34" charset="-120"/>
+              </a:rPr>
+              <a:t>62.5 / 68.1 / 71.0</a:t>
+            </a:r>
+            <a:endParaRPr lang="en-US" sz="2100" dirty="0"/>
+          </a:p>
+        </p:txBody>
+      </p:sp>
+      <p:sp>
+        <p:nvSpPr>
+          <p:cNvPr id="26" name="Text 22"/>
+          <p:cNvSpPr/>
+          <p:nvPr/>
+        </p:nvSpPr>
+        <p:spPr>
+          <a:xfrm>
+            <a:off x="7360920" y="5532120"/>
+            <a:ext cx="2194560" cy="274320"/>
+          </a:xfrm>
+          <a:prstGeom prst="rect">
+            <a:avLst/>
+          </a:prstGeom>
+          <a:noFill/>
+          <a:ln/>
+        </p:spPr>
+        <p:txBody>
+          <a:bodyPr wrap="square" lIns="0" tIns="0" rIns="0" bIns="0" rtlCol="0" anchor="ctr"/>
+          <a:lstStyle/>
+          <a:p>
+            <a:pPr marL="0" indent="0">
+              <a:buNone/>
+            </a:pPr>
+            <a:r>
+              <a:rPr lang="en-US" sz="950" dirty="0">
+                <a:solidFill>
+                  <a:srgbClr val="64748B"/>
+                </a:solidFill>
+                <a:latin typeface="Calibri" pitchFamily="34" charset="0"/>
+                <a:ea typeface="Calibri" pitchFamily="34" charset="-122"/>
+                <a:cs typeface="Calibri" pitchFamily="34" charset="-120"/>
+              </a:rPr>
+              <a:t>ERP / BP / Combined %</a:t>
+            </a:r>
+            <a:endParaRPr lang="en-US" sz="950" dirty="0"/>
+          </a:p>
+        </p:txBody>
+      </p:sp>
+      <p:sp>
+        <p:nvSpPr>
+          <p:cNvPr id="27" name="Text 23"/>
+          <p:cNvSpPr/>
+          <p:nvPr/>
+        </p:nvSpPr>
+        <p:spPr>
+          <a:xfrm>
+            <a:off x="9646920" y="4846320"/>
+            <a:ext cx="1828800" cy="1280160"/>
+          </a:xfrm>
+          <a:prstGeom prst="rect">
+            <a:avLst/>
+          </a:prstGeom>
+          <a:noFill/>
+          <a:ln/>
+        </p:spPr>
+        <p:txBody>
+          <a:bodyPr wrap="square" lIns="0" tIns="0" rIns="0" bIns="0" rtlCol="0" anchor="t"/>
+          <a:lstStyle/>
+          <a:p>
+            <a:pPr marL="0" indent="0">
+              <a:lnSpc>
+                <a:spcPct val="105000"/>
+              </a:lnSpc>
+              <a:buNone/>
+            </a:pPr>
+            <a:r>
+              <a:rPr lang="en-US" sz="950" b="1" dirty="0">
+                <a:solidFill>
+                  <a:srgbClr val="1E293B"/>
+                </a:solidFill>
+                <a:latin typeface="Calibri" pitchFamily="34" charset="0"/>
+                <a:ea typeface="Calibri" pitchFamily="34" charset="-122"/>
+                <a:cs typeface="Calibri" pitchFamily="34" charset="-120"/>
+              </a:rPr>
+              <a:t>Combined wins both. </a:t>
+            </a:r>
+            <a:r>
+              <a:rPr lang="en-US" sz="950" dirty="0">
+                <a:solidFill>
+                  <a:srgbClr val="64748B"/>
+                </a:solidFill>
+                <a:latin typeface="Calibri" pitchFamily="34" charset="0"/>
+                <a:ea typeface="Calibri" pitchFamily="34" charset="-122"/>
+                <a:cs typeface="Calibri" pitchFamily="34" charset="-120"/>
+              </a:rPr>
+              <a:t>Band-power alone edges ERP; fusing them adds ~3 pts. Best cross-subject result of any model here.</a:t>
+            </a:r>
+            <a:endParaRPr lang="en-US" sz="950" dirty="0"/>
+          </a:p>
+        </p:txBody>
+      </p:sp>
+      <p:sp>
+        <p:nvSpPr>
+          <p:cNvPr id="28" name="Shape 2">
+            <a:extLst>
+              <a:ext uri="{FF2B5EF4-FFF2-40B4-BE49-F238E27FC236}">
+                <a16:creationId xmlns:a16="http://schemas.microsoft.com/office/drawing/2014/main" id="{FD908358-EB4C-F5C4-CD7F-014020CC78FC}"/>
+              </a:ext>
+            </a:extLst>
+          </p:cNvPr>
+          <p:cNvSpPr/>
+          <p:nvPr/>
+        </p:nvSpPr>
+        <p:spPr>
+          <a:xfrm>
+            <a:off x="548640" y="1463040"/>
+            <a:ext cx="4023360" cy="2788920"/>
+          </a:xfrm>
+          <a:prstGeom prst="roundRect">
+            <a:avLst>
+              <a:gd name="adj" fmla="val 2623"/>
+            </a:avLst>
+          </a:prstGeom>
+          <a:solidFill>
+            <a:srgbClr val="FFFFFF"/>
+          </a:solidFill>
+          <a:ln/>
+          <a:effectLst>
+            <a:outerShdw blurRad="88900" dist="38100" dir="5400000" algn="bl" rotWithShape="0">
+              <a:srgbClr val="000000">
+                <a:alpha val="13000"/>
+              </a:srgbClr>
+            </a:outerShdw>
+          </a:effectLst>
+        </p:spPr>
+        <p:txBody>
+          <a:bodyPr/>
+          <a:lstStyle/>
+          <a:p>
+            <a:endParaRPr lang="en-US"/>
+          </a:p>
+        </p:txBody>
+      </p:sp>
+      <p:sp>
+        <p:nvSpPr>
+          <p:cNvPr id="29" name="Text 3">
+            <a:extLst>
+              <a:ext uri="{FF2B5EF4-FFF2-40B4-BE49-F238E27FC236}">
+                <a16:creationId xmlns:a16="http://schemas.microsoft.com/office/drawing/2014/main" id="{C0096BF0-F6DD-8CC4-FE9E-9E59E9FCB935}"/>
+              </a:ext>
+            </a:extLst>
+          </p:cNvPr>
+          <p:cNvSpPr/>
+          <p:nvPr/>
+        </p:nvSpPr>
+        <p:spPr>
+          <a:xfrm>
+            <a:off x="777240" y="1627632"/>
+            <a:ext cx="3566160" cy="320040"/>
+          </a:xfrm>
+          <a:prstGeom prst="rect">
+            <a:avLst/>
+          </a:prstGeom>
+          <a:noFill/>
+          <a:ln/>
+        </p:spPr>
+        <p:txBody>
+          <a:bodyPr wrap="square" lIns="0" tIns="0" rIns="0" bIns="0" rtlCol="0" anchor="ctr"/>
+          <a:lstStyle/>
+          <a:p>
+            <a:pPr marL="0" indent="0">
+              <a:buNone/>
+            </a:pPr>
+            <a:r>
+              <a:rPr lang="en-US" sz="1500" b="1" dirty="0">
+                <a:solidFill>
+                  <a:srgbClr val="21295C"/>
+                </a:solidFill>
+                <a:latin typeface="Cambria" pitchFamily="34" charset="0"/>
+                <a:ea typeface="Cambria" pitchFamily="34" charset="-122"/>
+                <a:cs typeface="Cambria" pitchFamily="34" charset="-120"/>
+              </a:rPr>
+              <a:t>Three feature pipelines</a:t>
+            </a:r>
+            <a:endParaRPr lang="en-US" sz="1500" dirty="0"/>
+          </a:p>
+        </p:txBody>
+      </p:sp>
+      <p:sp>
+        <p:nvSpPr>
+          <p:cNvPr id="30" name="Text 4">
+            <a:extLst>
+              <a:ext uri="{FF2B5EF4-FFF2-40B4-BE49-F238E27FC236}">
+                <a16:creationId xmlns:a16="http://schemas.microsoft.com/office/drawing/2014/main" id="{DF519DE6-2280-8904-8E75-536F69E97ACA}"/>
+              </a:ext>
+            </a:extLst>
+          </p:cNvPr>
+          <p:cNvSpPr/>
+          <p:nvPr/>
+        </p:nvSpPr>
+        <p:spPr>
+          <a:xfrm>
+            <a:off x="777240" y="1970532"/>
+            <a:ext cx="3566160" cy="274320"/>
+          </a:xfrm>
+          <a:prstGeom prst="rect">
+            <a:avLst/>
+          </a:prstGeom>
+          <a:noFill/>
+          <a:ln/>
+        </p:spPr>
+        <p:txBody>
+          <a:bodyPr wrap="square" lIns="0" tIns="0" rIns="0" bIns="0" rtlCol="0" anchor="ctr"/>
+          <a:lstStyle/>
+          <a:p>
+            <a:pPr marL="0" indent="0">
+              <a:buNone/>
+            </a:pPr>
+            <a:r>
+              <a:rPr lang="en-US" sz="1200" b="1" dirty="0">
+                <a:solidFill>
+                  <a:srgbClr val="1C7293"/>
+                </a:solidFill>
+                <a:latin typeface="Calibri" pitchFamily="34" charset="0"/>
+                <a:ea typeface="Calibri" pitchFamily="34" charset="-122"/>
+                <a:cs typeface="Calibri" pitchFamily="34" charset="-120"/>
+              </a:rPr>
+              <a:t>ERP (time)</a:t>
+            </a:r>
+            <a:endParaRPr lang="en-US" sz="1200" dirty="0"/>
+          </a:p>
+        </p:txBody>
+      </p:sp>
+      <p:sp>
+        <p:nvSpPr>
+          <p:cNvPr id="31" name="Text 5">
+            <a:extLst>
+              <a:ext uri="{FF2B5EF4-FFF2-40B4-BE49-F238E27FC236}">
+                <a16:creationId xmlns:a16="http://schemas.microsoft.com/office/drawing/2014/main" id="{F9C9292D-8496-2FFD-0D37-0D31E8F1EFB0}"/>
+              </a:ext>
+            </a:extLst>
+          </p:cNvPr>
+          <p:cNvSpPr/>
+          <p:nvPr/>
+        </p:nvSpPr>
+        <p:spPr>
+          <a:xfrm>
+            <a:off x="777240" y="2226564"/>
+            <a:ext cx="3566160" cy="502920"/>
+          </a:xfrm>
+          <a:prstGeom prst="rect">
+            <a:avLst/>
+          </a:prstGeom>
+          <a:noFill/>
+          <a:ln/>
+        </p:spPr>
+        <p:txBody>
+          <a:bodyPr wrap="square" lIns="0" tIns="0" rIns="0" bIns="0" rtlCol="0" anchor="ctr"/>
+          <a:lstStyle/>
+          <a:p>
+            <a:pPr marL="0" indent="0">
+              <a:lnSpc>
+                <a:spcPct val="100000"/>
+              </a:lnSpc>
+              <a:buNone/>
+            </a:pPr>
+            <a:r>
+              <a:rPr lang="en-US" sz="1000" dirty="0">
+                <a:solidFill>
+                  <a:srgbClr val="64748B"/>
+                </a:solidFill>
+                <a:latin typeface="Calibri" pitchFamily="34" charset="0"/>
+                <a:ea typeface="Calibri" pitchFamily="34" charset="-122"/>
+                <a:cs typeface="Calibri" pitchFamily="34" charset="-120"/>
+              </a:rPr>
+              <a:t>Peak amplitude/latency &amp; mean-window features on 8 central channels — the evoked SEP.</a:t>
+            </a:r>
+            <a:endParaRPr lang="en-US" sz="1000" dirty="0"/>
+          </a:p>
+        </p:txBody>
+      </p:sp>
+      <p:sp>
+        <p:nvSpPr>
+          <p:cNvPr id="32" name="Text 6">
+            <a:extLst>
+              <a:ext uri="{FF2B5EF4-FFF2-40B4-BE49-F238E27FC236}">
+                <a16:creationId xmlns:a16="http://schemas.microsoft.com/office/drawing/2014/main" id="{DD2DA232-2EDD-B81E-72E0-52512E76FBE8}"/>
+              </a:ext>
+            </a:extLst>
+          </p:cNvPr>
+          <p:cNvSpPr/>
+          <p:nvPr/>
+        </p:nvSpPr>
+        <p:spPr>
+          <a:xfrm>
+            <a:off x="777240" y="2692908"/>
+            <a:ext cx="3566160" cy="274320"/>
+          </a:xfrm>
+          <a:prstGeom prst="rect">
+            <a:avLst/>
+          </a:prstGeom>
+          <a:noFill/>
+          <a:ln/>
+        </p:spPr>
+        <p:txBody>
+          <a:bodyPr wrap="square" lIns="0" tIns="0" rIns="0" bIns="0" rtlCol="0" anchor="ctr"/>
+          <a:lstStyle/>
+          <a:p>
+            <a:pPr marL="0" indent="0">
+              <a:buNone/>
+            </a:pPr>
+            <a:r>
+              <a:rPr lang="en-US" sz="1200" b="1" dirty="0">
+                <a:solidFill>
+                  <a:srgbClr val="1C7293"/>
+                </a:solidFill>
+                <a:latin typeface="Calibri" pitchFamily="34" charset="0"/>
+                <a:ea typeface="Calibri" pitchFamily="34" charset="-122"/>
+                <a:cs typeface="Calibri" pitchFamily="34" charset="-120"/>
+              </a:rPr>
+              <a:t>Band-power (freq)</a:t>
+            </a:r>
+            <a:endParaRPr lang="en-US" sz="1200" dirty="0"/>
+          </a:p>
+        </p:txBody>
+      </p:sp>
+      <p:sp>
+        <p:nvSpPr>
+          <p:cNvPr id="33" name="Text 7">
+            <a:extLst>
+              <a:ext uri="{FF2B5EF4-FFF2-40B4-BE49-F238E27FC236}">
+                <a16:creationId xmlns:a16="http://schemas.microsoft.com/office/drawing/2014/main" id="{6FAFC249-3379-F732-C405-F3BF44FEA82A}"/>
+              </a:ext>
+            </a:extLst>
+          </p:cNvPr>
+          <p:cNvSpPr/>
+          <p:nvPr/>
+        </p:nvSpPr>
+        <p:spPr>
+          <a:xfrm>
+            <a:off x="777240" y="2948940"/>
+            <a:ext cx="3566160" cy="502920"/>
+          </a:xfrm>
+          <a:prstGeom prst="rect">
+            <a:avLst/>
+          </a:prstGeom>
+          <a:noFill/>
+          <a:ln/>
+        </p:spPr>
+        <p:txBody>
+          <a:bodyPr wrap="square" lIns="0" tIns="0" rIns="0" bIns="0" rtlCol="0" anchor="ctr"/>
+          <a:lstStyle/>
+          <a:p>
+            <a:pPr marL="0" indent="0">
+              <a:lnSpc>
+                <a:spcPct val="100000"/>
+              </a:lnSpc>
+              <a:buNone/>
+            </a:pPr>
+            <a:r>
+              <a:rPr lang="en-US" sz="1000" dirty="0">
+                <a:solidFill>
+                  <a:srgbClr val="64748B"/>
+                </a:solidFill>
+                <a:latin typeface="Calibri" pitchFamily="34" charset="0"/>
+                <a:ea typeface="Calibri" pitchFamily="34" charset="-122"/>
+                <a:cs typeface="Calibri" pitchFamily="34" charset="-120"/>
+              </a:rPr>
+              <a:t>log Welch PSD in delta/theta/alpha/beta/gamma across all 60 channels — the induced response.</a:t>
+            </a:r>
+            <a:endParaRPr lang="en-US" sz="1000" dirty="0"/>
+          </a:p>
+        </p:txBody>
+      </p:sp>
+      <p:sp>
+        <p:nvSpPr>
+          <p:cNvPr id="34" name="Text 8">
+            <a:extLst>
+              <a:ext uri="{FF2B5EF4-FFF2-40B4-BE49-F238E27FC236}">
+                <a16:creationId xmlns:a16="http://schemas.microsoft.com/office/drawing/2014/main" id="{A5F641C8-2074-9A1F-C57D-D3A310035AE0}"/>
+              </a:ext>
+            </a:extLst>
+          </p:cNvPr>
+          <p:cNvSpPr/>
+          <p:nvPr/>
+        </p:nvSpPr>
+        <p:spPr>
+          <a:xfrm>
+            <a:off x="777240" y="3415284"/>
+            <a:ext cx="3566160" cy="274320"/>
+          </a:xfrm>
+          <a:prstGeom prst="rect">
+            <a:avLst/>
+          </a:prstGeom>
+          <a:noFill/>
+          <a:ln/>
+        </p:spPr>
+        <p:txBody>
+          <a:bodyPr wrap="square" lIns="0" tIns="0" rIns="0" bIns="0" rtlCol="0" anchor="ctr"/>
+          <a:lstStyle/>
+          <a:p>
+            <a:pPr marL="0" indent="0">
+              <a:buNone/>
+            </a:pPr>
+            <a:r>
+              <a:rPr lang="en-US" sz="1200" b="1" dirty="0">
+                <a:solidFill>
+                  <a:srgbClr val="B85042"/>
+                </a:solidFill>
+                <a:latin typeface="Calibri" pitchFamily="34" charset="0"/>
+                <a:ea typeface="Calibri" pitchFamily="34" charset="-122"/>
+                <a:cs typeface="Calibri" pitchFamily="34" charset="-120"/>
+              </a:rPr>
+              <a:t>Combined</a:t>
+            </a:r>
+            <a:endParaRPr lang="en-US" sz="1200" dirty="0"/>
+          </a:p>
+        </p:txBody>
+      </p:sp>
+      <p:sp>
+        <p:nvSpPr>
+          <p:cNvPr id="35" name="Text 9">
+            <a:extLst>
+              <a:ext uri="{FF2B5EF4-FFF2-40B4-BE49-F238E27FC236}">
+                <a16:creationId xmlns:a16="http://schemas.microsoft.com/office/drawing/2014/main" id="{9307C81E-0343-7353-712F-3AEEFEFBB522}"/>
+              </a:ext>
+            </a:extLst>
+          </p:cNvPr>
+          <p:cNvSpPr/>
+          <p:nvPr/>
+        </p:nvSpPr>
+        <p:spPr>
+          <a:xfrm>
+            <a:off x="777240" y="3671316"/>
+            <a:ext cx="3566160" cy="502920"/>
+          </a:xfrm>
+          <a:prstGeom prst="rect">
+            <a:avLst/>
+          </a:prstGeom>
+          <a:noFill/>
+          <a:ln/>
+        </p:spPr>
+        <p:txBody>
+          <a:bodyPr wrap="square" lIns="0" tIns="0" rIns="0" bIns="0" rtlCol="0" anchor="ctr"/>
+          <a:lstStyle/>
+          <a:p>
+            <a:pPr marL="0" indent="0">
+              <a:lnSpc>
+                <a:spcPct val="100000"/>
+              </a:lnSpc>
+              <a:buNone/>
+            </a:pPr>
+            <a:r>
+              <a:rPr lang="en-US" sz="1000" dirty="0">
+                <a:solidFill>
+                  <a:srgbClr val="64748B"/>
+                </a:solidFill>
+                <a:latin typeface="Calibri" pitchFamily="34" charset="0"/>
+                <a:ea typeface="Calibri" pitchFamily="34" charset="-122"/>
+                <a:cs typeface="Calibri" pitchFamily="34" charset="-120"/>
+              </a:rPr>
+              <a:t>ERP ⊕ band-power concatenated — distinct neural phenomena, non-redundant features.</a:t>
+            </a:r>
+            <a:endParaRPr lang="en-US" sz="1000" dirty="0"/>
+          </a:p>
+        </p:txBody>
+      </p:sp>
       <p:pic>
         <p:nvPicPr>
-          <p:cNvPr id="18" name="Image 1" descr="assets/bp_signature.png"/>
+          <p:cNvPr id="5" name="Picture 4">
+            <a:extLst>
+              <a:ext uri="{FF2B5EF4-FFF2-40B4-BE49-F238E27FC236}">
+                <a16:creationId xmlns:a16="http://schemas.microsoft.com/office/drawing/2014/main" id="{20EFDD02-F5C1-D386-E8A1-5F31AE518C90}"/>
+              </a:ext>
+            </a:extLst>
+          </p:cNvPr>
           <p:cNvPicPr>
             <a:picLocks noChangeAspect="1"/>
           </p:cNvPicPr>
@@ -7102,742 +7797,44 @@
         </p:blipFill>
         <p:spPr>
           <a:xfrm>
-            <a:off x="8748423" y="1920240"/>
-            <a:ext cx="2743200" cy="1691640"/>
+            <a:off x="9293044" y="1814958"/>
+            <a:ext cx="1754352" cy="1049953"/>
           </a:xfrm>
           <a:prstGeom prst="rect">
             <a:avLst/>
           </a:prstGeom>
         </p:spPr>
       </p:pic>
-      <p:sp>
-        <p:nvSpPr>
-          <p:cNvPr id="19" name="Text 15"/>
-          <p:cNvSpPr/>
-          <p:nvPr/>
-        </p:nvSpPr>
-        <p:spPr>
-          <a:xfrm>
-            <a:off x="8748423" y="3671316"/>
-            <a:ext cx="2788920" cy="457200"/>
-          </a:xfrm>
-          <a:prstGeom prst="rect">
-            <a:avLst/>
-          </a:prstGeom>
-          <a:noFill/>
-          <a:ln/>
-        </p:spPr>
-        <p:txBody>
-          <a:bodyPr wrap="square" lIns="0" tIns="0" rIns="0" bIns="0" rtlCol="0" anchor="ctr"/>
-          <a:lstStyle/>
-          <a:p>
-            <a:pPr marL="0" indent="0" algn="ctr">
-              <a:buNone/>
-            </a:pPr>
-            <a:r>
-              <a:rPr lang="en-US" sz="900" i="1" dirty="0">
-                <a:solidFill>
-                  <a:srgbClr val="64748B"/>
-                </a:solidFill>
-                <a:latin typeface="Calibri" pitchFamily="34" charset="0"/>
-                <a:ea typeface="Calibri" pitchFamily="34" charset="-122"/>
-                <a:cs typeface="Calibri" pitchFamily="34" charset="-120"/>
-              </a:rPr>
-              <a:t>gamma↑ / alpha↓ activation drives the band-power model</a:t>
-            </a:r>
-            <a:endParaRPr lang="en-US" sz="900" dirty="0"/>
-          </a:p>
-        </p:txBody>
-      </p:sp>
-      <p:sp>
-        <p:nvSpPr>
-          <p:cNvPr id="20" name="Shape 16"/>
-          <p:cNvSpPr/>
-          <p:nvPr/>
-        </p:nvSpPr>
-        <p:spPr>
-          <a:xfrm>
-            <a:off x="4800600" y="4663440"/>
-            <a:ext cx="6812280" cy="1627632"/>
-          </a:xfrm>
-          <a:prstGeom prst="roundRect">
-            <a:avLst>
-              <a:gd name="adj" fmla="val 4494"/>
-            </a:avLst>
-          </a:prstGeom>
-          <a:solidFill>
-            <a:srgbClr val="FFFFFF"/>
-          </a:solidFill>
-          <a:ln/>
-          <a:effectLst>
-            <a:outerShdw blurRad="88900" dist="38100" dir="5400000" algn="bl" rotWithShape="0">
-              <a:srgbClr val="000000">
-                <a:alpha val="13000"/>
-              </a:srgbClr>
-            </a:outerShdw>
-          </a:effectLst>
-        </p:spPr>
-        <p:txBody>
-          <a:bodyPr/>
-          <a:lstStyle/>
-          <a:p>
-            <a:endParaRPr lang="en-US"/>
-          </a:p>
-        </p:txBody>
-      </p:sp>
-      <p:sp>
-        <p:nvSpPr>
-          <p:cNvPr id="21" name="Text 17"/>
-          <p:cNvSpPr/>
-          <p:nvPr/>
-        </p:nvSpPr>
-        <p:spPr>
-          <a:xfrm>
-            <a:off x="5029200" y="4828032"/>
-            <a:ext cx="2194560" cy="274320"/>
-          </a:xfrm>
-          <a:prstGeom prst="rect">
-            <a:avLst/>
-          </a:prstGeom>
-          <a:noFill/>
-          <a:ln/>
-        </p:spPr>
-        <p:txBody>
-          <a:bodyPr wrap="square" lIns="0" tIns="0" rIns="0" bIns="0" rtlCol="0" anchor="ctr"/>
-          <a:lstStyle/>
-          <a:p>
-            <a:pPr marL="0" indent="0">
-              <a:buNone/>
-            </a:pPr>
-            <a:r>
-              <a:rPr lang="en-US" sz="1100" b="1" dirty="0">
-                <a:solidFill>
-                  <a:srgbClr val="64748B"/>
-                </a:solidFill>
-                <a:latin typeface="Calibri" pitchFamily="34" charset="0"/>
-                <a:ea typeface="Calibri" pitchFamily="34" charset="-122"/>
-                <a:cs typeface="Calibri" pitchFamily="34" charset="-120"/>
-              </a:rPr>
-              <a:t>LOSO (cross-subject)</a:t>
-            </a:r>
-            <a:endParaRPr lang="en-US" sz="1100" dirty="0"/>
-          </a:p>
-        </p:txBody>
-      </p:sp>
-      <p:sp>
-        <p:nvSpPr>
-          <p:cNvPr id="22" name="Text 18"/>
-          <p:cNvSpPr/>
-          <p:nvPr/>
-        </p:nvSpPr>
-        <p:spPr>
-          <a:xfrm>
-            <a:off x="5029200" y="5074920"/>
-            <a:ext cx="2194560" cy="457200"/>
-          </a:xfrm>
-          <a:prstGeom prst="rect">
-            <a:avLst/>
-          </a:prstGeom>
-          <a:noFill/>
-          <a:ln/>
-        </p:spPr>
-        <p:txBody>
-          <a:bodyPr wrap="square" lIns="0" tIns="0" rIns="0" bIns="0" rtlCol="0" anchor="ctr"/>
-          <a:lstStyle/>
-          <a:p>
-            <a:pPr marL="0" indent="0">
-              <a:buNone/>
-            </a:pPr>
-            <a:r>
-              <a:rPr lang="en-US" sz="2100" b="1" dirty="0">
-                <a:solidFill>
-                  <a:srgbClr val="1C7293"/>
-                </a:solidFill>
-                <a:latin typeface="Cambria" pitchFamily="34" charset="0"/>
-                <a:ea typeface="Cambria" pitchFamily="34" charset="-122"/>
-                <a:cs typeface="Cambria" pitchFamily="34" charset="-120"/>
-              </a:rPr>
-              <a:t>57.8 / 58.3 / 61.7</a:t>
-            </a:r>
-            <a:endParaRPr lang="en-US" sz="2100" dirty="0"/>
-          </a:p>
-        </p:txBody>
-      </p:sp>
-      <p:sp>
-        <p:nvSpPr>
-          <p:cNvPr id="23" name="Text 19"/>
-          <p:cNvSpPr/>
-          <p:nvPr/>
-        </p:nvSpPr>
-        <p:spPr>
-          <a:xfrm>
-            <a:off x="5029200" y="5532120"/>
-            <a:ext cx="2194560" cy="274320"/>
-          </a:xfrm>
-          <a:prstGeom prst="rect">
-            <a:avLst/>
-          </a:prstGeom>
-          <a:noFill/>
-          <a:ln/>
-        </p:spPr>
-        <p:txBody>
-          <a:bodyPr wrap="square" lIns="0" tIns="0" rIns="0" bIns="0" rtlCol="0" anchor="ctr"/>
-          <a:lstStyle/>
-          <a:p>
-            <a:pPr marL="0" indent="0">
-              <a:buNone/>
-            </a:pPr>
-            <a:r>
-              <a:rPr lang="en-US" sz="950" dirty="0">
-                <a:solidFill>
-                  <a:srgbClr val="64748B"/>
-                </a:solidFill>
-                <a:latin typeface="Calibri" pitchFamily="34" charset="0"/>
-                <a:ea typeface="Calibri" pitchFamily="34" charset="-122"/>
-                <a:cs typeface="Calibri" pitchFamily="34" charset="-120"/>
-              </a:rPr>
-              <a:t>ERP / BP / Combined %</a:t>
-            </a:r>
-            <a:endParaRPr lang="en-US" sz="950" dirty="0"/>
-          </a:p>
-        </p:txBody>
-      </p:sp>
-      <p:sp>
-        <p:nvSpPr>
-          <p:cNvPr id="24" name="Text 20"/>
-          <p:cNvSpPr/>
-          <p:nvPr/>
-        </p:nvSpPr>
-        <p:spPr>
-          <a:xfrm>
-            <a:off x="7360920" y="4828032"/>
-            <a:ext cx="2194560" cy="274320"/>
-          </a:xfrm>
-          <a:prstGeom prst="rect">
-            <a:avLst/>
-          </a:prstGeom>
-          <a:noFill/>
-          <a:ln/>
-        </p:spPr>
-        <p:txBody>
-          <a:bodyPr wrap="square" lIns="0" tIns="0" rIns="0" bIns="0" rtlCol="0" anchor="ctr"/>
-          <a:lstStyle/>
-          <a:p>
-            <a:pPr marL="0" indent="0">
-              <a:buNone/>
-            </a:pPr>
-            <a:r>
-              <a:rPr lang="en-US" sz="1100" b="1" dirty="0">
-                <a:solidFill>
-                  <a:srgbClr val="64748B"/>
-                </a:solidFill>
-                <a:latin typeface="Calibri" pitchFamily="34" charset="0"/>
-                <a:ea typeface="Calibri" pitchFamily="34" charset="-122"/>
-                <a:cs typeface="Calibri" pitchFamily="34" charset="-120"/>
-              </a:rPr>
-              <a:t>Within-subject</a:t>
-            </a:r>
-            <a:endParaRPr lang="en-US" sz="1100" dirty="0"/>
-          </a:p>
-        </p:txBody>
-      </p:sp>
-      <p:sp>
-        <p:nvSpPr>
-          <p:cNvPr id="25" name="Text 21"/>
-          <p:cNvSpPr/>
-          <p:nvPr/>
-        </p:nvSpPr>
-        <p:spPr>
-          <a:xfrm>
-            <a:off x="7360920" y="5074920"/>
-            <a:ext cx="2194560" cy="457200"/>
-          </a:xfrm>
-          <a:prstGeom prst="rect">
-            <a:avLst/>
-          </a:prstGeom>
-          <a:noFill/>
-          <a:ln/>
-        </p:spPr>
-        <p:txBody>
-          <a:bodyPr wrap="square" lIns="0" tIns="0" rIns="0" bIns="0" rtlCol="0" anchor="ctr"/>
-          <a:lstStyle/>
-          <a:p>
-            <a:pPr marL="0" indent="0">
-              <a:buNone/>
-            </a:pPr>
-            <a:r>
-              <a:rPr lang="en-US" sz="2100" b="1" dirty="0">
-                <a:solidFill>
-                  <a:srgbClr val="21295C"/>
-                </a:solidFill>
-                <a:latin typeface="Cambria" pitchFamily="34" charset="0"/>
-                <a:ea typeface="Cambria" pitchFamily="34" charset="-122"/>
-                <a:cs typeface="Cambria" pitchFamily="34" charset="-120"/>
-              </a:rPr>
-              <a:t>62.5 / 68.1 / 71.0</a:t>
-            </a:r>
-            <a:endParaRPr lang="en-US" sz="2100" dirty="0"/>
-          </a:p>
-        </p:txBody>
-      </p:sp>
-      <p:sp>
-        <p:nvSpPr>
-          <p:cNvPr id="26" name="Text 22"/>
-          <p:cNvSpPr/>
-          <p:nvPr/>
-        </p:nvSpPr>
-        <p:spPr>
-          <a:xfrm>
-            <a:off x="7360920" y="5532120"/>
-            <a:ext cx="2194560" cy="274320"/>
-          </a:xfrm>
-          <a:prstGeom prst="rect">
-            <a:avLst/>
-          </a:prstGeom>
-          <a:noFill/>
-          <a:ln/>
-        </p:spPr>
-        <p:txBody>
-          <a:bodyPr wrap="square" lIns="0" tIns="0" rIns="0" bIns="0" rtlCol="0" anchor="ctr"/>
-          <a:lstStyle/>
-          <a:p>
-            <a:pPr marL="0" indent="0">
-              <a:buNone/>
-            </a:pPr>
-            <a:r>
-              <a:rPr lang="en-US" sz="950" dirty="0">
-                <a:solidFill>
-                  <a:srgbClr val="64748B"/>
-                </a:solidFill>
-                <a:latin typeface="Calibri" pitchFamily="34" charset="0"/>
-                <a:ea typeface="Calibri" pitchFamily="34" charset="-122"/>
-                <a:cs typeface="Calibri" pitchFamily="34" charset="-120"/>
-              </a:rPr>
-              <a:t>ERP / BP / Combined %</a:t>
-            </a:r>
-            <a:endParaRPr lang="en-US" sz="950" dirty="0"/>
-          </a:p>
-        </p:txBody>
-      </p:sp>
-      <p:sp>
-        <p:nvSpPr>
-          <p:cNvPr id="27" name="Text 23"/>
-          <p:cNvSpPr/>
-          <p:nvPr/>
-        </p:nvSpPr>
-        <p:spPr>
-          <a:xfrm>
-            <a:off x="9646920" y="4846320"/>
-            <a:ext cx="1828800" cy="1280160"/>
-          </a:xfrm>
-          <a:prstGeom prst="rect">
-            <a:avLst/>
-          </a:prstGeom>
-          <a:noFill/>
-          <a:ln/>
-        </p:spPr>
-        <p:txBody>
-          <a:bodyPr wrap="square" lIns="0" tIns="0" rIns="0" bIns="0" rtlCol="0" anchor="t"/>
-          <a:lstStyle/>
-          <a:p>
-            <a:pPr marL="0" indent="0">
-              <a:lnSpc>
-                <a:spcPct val="105000"/>
-              </a:lnSpc>
-              <a:buNone/>
-            </a:pPr>
-            <a:r>
-              <a:rPr lang="en-US" sz="950" b="1" dirty="0">
-                <a:solidFill>
-                  <a:srgbClr val="1E293B"/>
-                </a:solidFill>
-                <a:latin typeface="Calibri" pitchFamily="34" charset="0"/>
-                <a:ea typeface="Calibri" pitchFamily="34" charset="-122"/>
-                <a:cs typeface="Calibri" pitchFamily="34" charset="-120"/>
-              </a:rPr>
-              <a:t>Combined wins both. </a:t>
-            </a:r>
-            <a:r>
-              <a:rPr lang="en-US" sz="950" dirty="0">
-                <a:solidFill>
-                  <a:srgbClr val="64748B"/>
-                </a:solidFill>
-                <a:latin typeface="Calibri" pitchFamily="34" charset="0"/>
-                <a:ea typeface="Calibri" pitchFamily="34" charset="-122"/>
-                <a:cs typeface="Calibri" pitchFamily="34" charset="-120"/>
-              </a:rPr>
-              <a:t>Band-power alone edges ERP; fusing them adds ~3 pts. Best cross-subject result of any model here.</a:t>
-            </a:r>
-            <a:endParaRPr lang="en-US" sz="950" dirty="0"/>
-          </a:p>
-        </p:txBody>
-      </p:sp>
-      <p:sp>
-        <p:nvSpPr>
-          <p:cNvPr id="28" name="Shape 2">
+      <p:pic>
+        <p:nvPicPr>
+          <p:cNvPr id="7" name="Picture 6">
             <a:extLst>
               <a:ext uri="{FF2B5EF4-FFF2-40B4-BE49-F238E27FC236}">
-                <a16:creationId xmlns:a16="http://schemas.microsoft.com/office/drawing/2014/main" id="{FD908358-EB4C-F5C4-CD7F-014020CC78FC}"/>
+                <a16:creationId xmlns:a16="http://schemas.microsoft.com/office/drawing/2014/main" id="{074CFC60-6E34-9649-181B-7C20FF759D4D}"/>
               </a:ext>
             </a:extLst>
           </p:cNvPr>
-          <p:cNvSpPr/>
-          <p:nvPr/>
-        </p:nvSpPr>
-        <p:spPr>
-          <a:xfrm>
-            <a:off x="548640" y="1463040"/>
-            <a:ext cx="4023360" cy="2788920"/>
-          </a:xfrm>
-          <a:prstGeom prst="roundRect">
-            <a:avLst>
-              <a:gd name="adj" fmla="val 2623"/>
-            </a:avLst>
-          </a:prstGeom>
-          <a:solidFill>
-            <a:srgbClr val="FFFFFF"/>
-          </a:solidFill>
-          <a:ln/>
-          <a:effectLst>
-            <a:outerShdw blurRad="88900" dist="38100" dir="5400000" algn="bl" rotWithShape="0">
-              <a:srgbClr val="000000">
-                <a:alpha val="13000"/>
-              </a:srgbClr>
-            </a:outerShdw>
-          </a:effectLst>
-        </p:spPr>
-        <p:txBody>
-          <a:bodyPr/>
-          <a:lstStyle/>
-          <a:p>
-            <a:endParaRPr lang="en-US"/>
-          </a:p>
-        </p:txBody>
-      </p:sp>
-      <p:sp>
-        <p:nvSpPr>
-          <p:cNvPr id="29" name="Text 3">
-            <a:extLst>
-              <a:ext uri="{FF2B5EF4-FFF2-40B4-BE49-F238E27FC236}">
-                <a16:creationId xmlns:a16="http://schemas.microsoft.com/office/drawing/2014/main" id="{C0096BF0-F6DD-8CC4-FE9E-9E59E9FCB935}"/>
-              </a:ext>
-            </a:extLst>
-          </p:cNvPr>
-          <p:cNvSpPr/>
-          <p:nvPr/>
-        </p:nvSpPr>
-        <p:spPr>
-          <a:xfrm>
-            <a:off x="777240" y="1627632"/>
-            <a:ext cx="3566160" cy="320040"/>
-          </a:xfrm>
-          <a:prstGeom prst="rect">
-            <a:avLst/>
-          </a:prstGeom>
-          <a:noFill/>
-          <a:ln/>
-        </p:spPr>
-        <p:txBody>
-          <a:bodyPr wrap="square" lIns="0" tIns="0" rIns="0" bIns="0" rtlCol="0" anchor="ctr"/>
-          <a:lstStyle/>
-          <a:p>
-            <a:pPr marL="0" indent="0">
-              <a:buNone/>
-            </a:pPr>
-            <a:r>
-              <a:rPr lang="en-US" sz="1500" b="1" dirty="0">
-                <a:solidFill>
-                  <a:srgbClr val="21295C"/>
-                </a:solidFill>
-                <a:latin typeface="Cambria" pitchFamily="34" charset="0"/>
-                <a:ea typeface="Cambria" pitchFamily="34" charset="-122"/>
-                <a:cs typeface="Cambria" pitchFamily="34" charset="-120"/>
-              </a:rPr>
-              <a:t>Three feature pipelines</a:t>
-            </a:r>
-            <a:endParaRPr lang="en-US" sz="1500" dirty="0"/>
-          </a:p>
-        </p:txBody>
-      </p:sp>
-      <p:sp>
-        <p:nvSpPr>
-          <p:cNvPr id="30" name="Text 4">
-            <a:extLst>
-              <a:ext uri="{FF2B5EF4-FFF2-40B4-BE49-F238E27FC236}">
-                <a16:creationId xmlns:a16="http://schemas.microsoft.com/office/drawing/2014/main" id="{DF519DE6-2280-8904-8E75-536F69E97ACA}"/>
-              </a:ext>
-            </a:extLst>
-          </p:cNvPr>
-          <p:cNvSpPr/>
-          <p:nvPr/>
-        </p:nvSpPr>
-        <p:spPr>
-          <a:xfrm>
-            <a:off x="777240" y="1970532"/>
-            <a:ext cx="3566160" cy="274320"/>
-          </a:xfrm>
-          <a:prstGeom prst="rect">
-            <a:avLst/>
-          </a:prstGeom>
-          <a:noFill/>
-          <a:ln/>
-        </p:spPr>
-        <p:txBody>
-          <a:bodyPr wrap="square" lIns="0" tIns="0" rIns="0" bIns="0" rtlCol="0" anchor="ctr"/>
-          <a:lstStyle/>
-          <a:p>
-            <a:pPr marL="0" indent="0">
-              <a:buNone/>
-            </a:pPr>
-            <a:r>
-              <a:rPr lang="en-US" sz="1200" b="1" dirty="0">
-                <a:solidFill>
-                  <a:srgbClr val="1C7293"/>
-                </a:solidFill>
-                <a:latin typeface="Calibri" pitchFamily="34" charset="0"/>
-                <a:ea typeface="Calibri" pitchFamily="34" charset="-122"/>
-                <a:cs typeface="Calibri" pitchFamily="34" charset="-120"/>
-              </a:rPr>
-              <a:t>ERP (time)</a:t>
-            </a:r>
-            <a:endParaRPr lang="en-US" sz="1200" dirty="0"/>
-          </a:p>
-        </p:txBody>
-      </p:sp>
-      <p:sp>
-        <p:nvSpPr>
-          <p:cNvPr id="31" name="Text 5">
-            <a:extLst>
-              <a:ext uri="{FF2B5EF4-FFF2-40B4-BE49-F238E27FC236}">
-                <a16:creationId xmlns:a16="http://schemas.microsoft.com/office/drawing/2014/main" id="{F9C9292D-8496-2FFD-0D37-0D31E8F1EFB0}"/>
-              </a:ext>
-            </a:extLst>
-          </p:cNvPr>
-          <p:cNvSpPr/>
-          <p:nvPr/>
-        </p:nvSpPr>
-        <p:spPr>
-          <a:xfrm>
-            <a:off x="777240" y="2226564"/>
-            <a:ext cx="3566160" cy="502920"/>
-          </a:xfrm>
-          <a:prstGeom prst="rect">
-            <a:avLst/>
-          </a:prstGeom>
-          <a:noFill/>
-          <a:ln/>
-        </p:spPr>
-        <p:txBody>
-          <a:bodyPr wrap="square" lIns="0" tIns="0" rIns="0" bIns="0" rtlCol="0" anchor="ctr"/>
-          <a:lstStyle/>
-          <a:p>
-            <a:pPr marL="0" indent="0">
-              <a:lnSpc>
-                <a:spcPct val="100000"/>
-              </a:lnSpc>
-              <a:buNone/>
-            </a:pPr>
-            <a:r>
-              <a:rPr lang="en-US" sz="1000" dirty="0">
-                <a:solidFill>
-                  <a:srgbClr val="64748B"/>
-                </a:solidFill>
-                <a:latin typeface="Calibri" pitchFamily="34" charset="0"/>
-                <a:ea typeface="Calibri" pitchFamily="34" charset="-122"/>
-                <a:cs typeface="Calibri" pitchFamily="34" charset="-120"/>
-              </a:rPr>
-              <a:t>Peak amplitude/latency &amp; mean-window features on 8 central channels — the evoked SEP.</a:t>
-            </a:r>
-            <a:endParaRPr lang="en-US" sz="1000" dirty="0"/>
-          </a:p>
-        </p:txBody>
-      </p:sp>
-      <p:sp>
-        <p:nvSpPr>
-          <p:cNvPr id="32" name="Text 6">
-            <a:extLst>
-              <a:ext uri="{FF2B5EF4-FFF2-40B4-BE49-F238E27FC236}">
-                <a16:creationId xmlns:a16="http://schemas.microsoft.com/office/drawing/2014/main" id="{DD2DA232-2EDD-B81E-72E0-52512E76FBE8}"/>
-              </a:ext>
-            </a:extLst>
-          </p:cNvPr>
-          <p:cNvSpPr/>
-          <p:nvPr/>
-        </p:nvSpPr>
-        <p:spPr>
-          <a:xfrm>
-            <a:off x="777240" y="2692908"/>
-            <a:ext cx="3566160" cy="274320"/>
-          </a:xfrm>
-          <a:prstGeom prst="rect">
-            <a:avLst/>
-          </a:prstGeom>
-          <a:noFill/>
-          <a:ln/>
-        </p:spPr>
-        <p:txBody>
-          <a:bodyPr wrap="square" lIns="0" tIns="0" rIns="0" bIns="0" rtlCol="0" anchor="ctr"/>
-          <a:lstStyle/>
-          <a:p>
-            <a:pPr marL="0" indent="0">
-              <a:buNone/>
-            </a:pPr>
-            <a:r>
-              <a:rPr lang="en-US" sz="1200" b="1" dirty="0">
-                <a:solidFill>
-                  <a:srgbClr val="1C7293"/>
-                </a:solidFill>
-                <a:latin typeface="Calibri" pitchFamily="34" charset="0"/>
-                <a:ea typeface="Calibri" pitchFamily="34" charset="-122"/>
-                <a:cs typeface="Calibri" pitchFamily="34" charset="-120"/>
-              </a:rPr>
-              <a:t>Band-power (freq)</a:t>
-            </a:r>
-            <a:endParaRPr lang="en-US" sz="1200" dirty="0"/>
-          </a:p>
-        </p:txBody>
-      </p:sp>
-      <p:sp>
-        <p:nvSpPr>
-          <p:cNvPr id="33" name="Text 7">
-            <a:extLst>
-              <a:ext uri="{FF2B5EF4-FFF2-40B4-BE49-F238E27FC236}">
-                <a16:creationId xmlns:a16="http://schemas.microsoft.com/office/drawing/2014/main" id="{6FAFC249-3379-F732-C405-F3BF44FEA82A}"/>
-              </a:ext>
-            </a:extLst>
-          </p:cNvPr>
-          <p:cNvSpPr/>
-          <p:nvPr/>
-        </p:nvSpPr>
-        <p:spPr>
-          <a:xfrm>
-            <a:off x="777240" y="2948940"/>
-            <a:ext cx="3566160" cy="502920"/>
-          </a:xfrm>
-          <a:prstGeom prst="rect">
-            <a:avLst/>
-          </a:prstGeom>
-          <a:noFill/>
-          <a:ln/>
-        </p:spPr>
-        <p:txBody>
-          <a:bodyPr wrap="square" lIns="0" tIns="0" rIns="0" bIns="0" rtlCol="0" anchor="ctr"/>
-          <a:lstStyle/>
-          <a:p>
-            <a:pPr marL="0" indent="0">
-              <a:lnSpc>
-                <a:spcPct val="100000"/>
-              </a:lnSpc>
-              <a:buNone/>
-            </a:pPr>
-            <a:r>
-              <a:rPr lang="en-US" sz="1000" dirty="0">
-                <a:solidFill>
-                  <a:srgbClr val="64748B"/>
-                </a:solidFill>
-                <a:latin typeface="Calibri" pitchFamily="34" charset="0"/>
-                <a:ea typeface="Calibri" pitchFamily="34" charset="-122"/>
-                <a:cs typeface="Calibri" pitchFamily="34" charset="-120"/>
-              </a:rPr>
-              <a:t>log Welch PSD in delta/theta/alpha/beta/gamma across all 60 channels — the induced response.</a:t>
-            </a:r>
-            <a:endParaRPr lang="en-US" sz="1000" dirty="0"/>
-          </a:p>
-        </p:txBody>
-      </p:sp>
-      <p:sp>
-        <p:nvSpPr>
-          <p:cNvPr id="34" name="Text 8">
-            <a:extLst>
-              <a:ext uri="{FF2B5EF4-FFF2-40B4-BE49-F238E27FC236}">
-                <a16:creationId xmlns:a16="http://schemas.microsoft.com/office/drawing/2014/main" id="{A5F641C8-2074-9A1F-C57D-D3A310035AE0}"/>
-              </a:ext>
-            </a:extLst>
-          </p:cNvPr>
-          <p:cNvSpPr/>
-          <p:nvPr/>
-        </p:nvSpPr>
-        <p:spPr>
-          <a:xfrm>
-            <a:off x="777240" y="3415284"/>
-            <a:ext cx="3566160" cy="274320"/>
-          </a:xfrm>
-          <a:prstGeom prst="rect">
-            <a:avLst/>
-          </a:prstGeom>
-          <a:noFill/>
-          <a:ln/>
-        </p:spPr>
-        <p:txBody>
-          <a:bodyPr wrap="square" lIns="0" tIns="0" rIns="0" bIns="0" rtlCol="0" anchor="ctr"/>
-          <a:lstStyle/>
-          <a:p>
-            <a:pPr marL="0" indent="0">
-              <a:buNone/>
-            </a:pPr>
-            <a:r>
-              <a:rPr lang="en-US" sz="1200" b="1" dirty="0">
-                <a:solidFill>
-                  <a:srgbClr val="B85042"/>
-                </a:solidFill>
-                <a:latin typeface="Calibri" pitchFamily="34" charset="0"/>
-                <a:ea typeface="Calibri" pitchFamily="34" charset="-122"/>
-                <a:cs typeface="Calibri" pitchFamily="34" charset="-120"/>
-              </a:rPr>
-              <a:t>Combined</a:t>
-            </a:r>
-            <a:endParaRPr lang="en-US" sz="1200" dirty="0"/>
-          </a:p>
-        </p:txBody>
-      </p:sp>
-      <p:sp>
-        <p:nvSpPr>
-          <p:cNvPr id="35" name="Text 9">
-            <a:extLst>
-              <a:ext uri="{FF2B5EF4-FFF2-40B4-BE49-F238E27FC236}">
-                <a16:creationId xmlns:a16="http://schemas.microsoft.com/office/drawing/2014/main" id="{9307C81E-0343-7353-712F-3AEEFEFBB522}"/>
-              </a:ext>
-            </a:extLst>
-          </p:cNvPr>
-          <p:cNvSpPr/>
-          <p:nvPr/>
-        </p:nvSpPr>
-        <p:spPr>
-          <a:xfrm>
-            <a:off x="777240" y="3671316"/>
-            <a:ext cx="3566160" cy="502920"/>
-          </a:xfrm>
-          <a:prstGeom prst="rect">
-            <a:avLst/>
-          </a:prstGeom>
-          <a:noFill/>
-          <a:ln/>
-        </p:spPr>
-        <p:txBody>
-          <a:bodyPr wrap="square" lIns="0" tIns="0" rIns="0" bIns="0" rtlCol="0" anchor="ctr"/>
-          <a:lstStyle/>
-          <a:p>
-            <a:pPr marL="0" indent="0">
-              <a:lnSpc>
-                <a:spcPct val="100000"/>
-              </a:lnSpc>
-              <a:buNone/>
-            </a:pPr>
-            <a:r>
-              <a:rPr lang="en-US" sz="1000" dirty="0">
-                <a:solidFill>
-                  <a:srgbClr val="64748B"/>
-                </a:solidFill>
-                <a:latin typeface="Calibri" pitchFamily="34" charset="0"/>
-                <a:ea typeface="Calibri" pitchFamily="34" charset="-122"/>
-                <a:cs typeface="Calibri" pitchFamily="34" charset="-120"/>
-              </a:rPr>
-              <a:t>ERP ⊕ band-power concatenated — distinct neural phenomena, non-redundant features.</a:t>
-            </a:r>
-            <a:endParaRPr lang="en-US" sz="1000" dirty="0"/>
-          </a:p>
-        </p:txBody>
-      </p:sp>
+          <p:cNvPicPr>
+            <a:picLocks noChangeAspect="1"/>
+          </p:cNvPicPr>
+          <p:nvPr/>
+        </p:nvPicPr>
+        <p:blipFill>
+          <a:blip r:embed="rId5"/>
+          <a:stretch>
+            <a:fillRect/>
+          </a:stretch>
+        </p:blipFill>
+        <p:spPr>
+          <a:xfrm>
+            <a:off x="9288085" y="2867319"/>
+            <a:ext cx="1759311" cy="1306917"/>
+          </a:xfrm>
+          <a:prstGeom prst="rect">
+            <a:avLst/>
+          </a:prstGeom>
+        </p:spPr>
+      </p:pic>
     </p:spTree>
   </p:cSld>
   <p:clrMapOvr>
@@ -8538,9 +8535,338 @@
           </a:prstGeom>
         </p:spPr>
       </p:pic>
+      <p:sp>
+        <p:nvSpPr>
+          <p:cNvPr id="20" name="Shape 16"/>
+          <p:cNvSpPr/>
+          <p:nvPr/>
+        </p:nvSpPr>
+        <p:spPr>
+          <a:xfrm>
+            <a:off x="4800600" y="4663440"/>
+            <a:ext cx="6812280" cy="1627632"/>
+          </a:xfrm>
+          <a:prstGeom prst="roundRect">
+            <a:avLst>
+              <a:gd name="adj" fmla="val 4494"/>
+            </a:avLst>
+          </a:prstGeom>
+          <a:solidFill>
+            <a:srgbClr val="FFFFFF"/>
+          </a:solidFill>
+          <a:ln/>
+          <a:effectLst>
+            <a:outerShdw blurRad="88900" dist="38100" dir="5400000" algn="bl" rotWithShape="0">
+              <a:srgbClr val="000000">
+                <a:alpha val="13000"/>
+              </a:srgbClr>
+            </a:outerShdw>
+          </a:effectLst>
+        </p:spPr>
+        <p:txBody>
+          <a:bodyPr/>
+          <a:lstStyle/>
+          <a:p>
+            <a:endParaRPr lang="en-US"/>
+          </a:p>
+        </p:txBody>
+      </p:sp>
+      <p:sp>
+        <p:nvSpPr>
+          <p:cNvPr id="21" name="Text 17"/>
+          <p:cNvSpPr/>
+          <p:nvPr/>
+        </p:nvSpPr>
+        <p:spPr>
+          <a:xfrm>
+            <a:off x="5029200" y="4828032"/>
+            <a:ext cx="2194560" cy="274320"/>
+          </a:xfrm>
+          <a:prstGeom prst="rect">
+            <a:avLst/>
+          </a:prstGeom>
+          <a:noFill/>
+          <a:ln/>
+        </p:spPr>
+        <p:txBody>
+          <a:bodyPr wrap="square" lIns="0" tIns="0" rIns="0" bIns="0" rtlCol="0" anchor="ctr"/>
+          <a:lstStyle/>
+          <a:p>
+            <a:pPr marL="0" indent="0">
+              <a:buNone/>
+            </a:pPr>
+            <a:r>
+              <a:rPr lang="en-US" sz="1100" b="1" dirty="0">
+                <a:solidFill>
+                  <a:srgbClr val="64748B"/>
+                </a:solidFill>
+                <a:latin typeface="Calibri" pitchFamily="34" charset="0"/>
+                <a:ea typeface="Calibri" pitchFamily="34" charset="-122"/>
+                <a:cs typeface="Calibri" pitchFamily="34" charset="-120"/>
+              </a:rPr>
+              <a:t>LOSO (cross-subject)</a:t>
+            </a:r>
+            <a:endParaRPr lang="en-US" sz="1100" dirty="0"/>
+          </a:p>
+        </p:txBody>
+      </p:sp>
+      <p:sp>
+        <p:nvSpPr>
+          <p:cNvPr id="22" name="Text 18"/>
+          <p:cNvSpPr/>
+          <p:nvPr/>
+        </p:nvSpPr>
+        <p:spPr>
+          <a:xfrm>
+            <a:off x="5029200" y="5074920"/>
+            <a:ext cx="2194560" cy="457200"/>
+          </a:xfrm>
+          <a:prstGeom prst="rect">
+            <a:avLst/>
+          </a:prstGeom>
+          <a:noFill/>
+          <a:ln/>
+        </p:spPr>
+        <p:txBody>
+          <a:bodyPr wrap="square" lIns="0" tIns="0" rIns="0" bIns="0" rtlCol="0" anchor="ctr"/>
+          <a:lstStyle/>
+          <a:p>
+            <a:pPr marL="0" indent="0">
+              <a:buNone/>
+            </a:pPr>
+            <a:r>
+              <a:rPr lang="en-US" sz="2100" b="1" dirty="0">
+                <a:solidFill>
+                  <a:srgbClr val="1C7293"/>
+                </a:solidFill>
+                <a:latin typeface="Cambria" pitchFamily="34" charset="0"/>
+                <a:ea typeface="Cambria" pitchFamily="34" charset="-122"/>
+                <a:cs typeface="Cambria" pitchFamily="34" charset="-120"/>
+              </a:rPr>
+              <a:t>44.8 / 44.2 / 48.7</a:t>
+            </a:r>
+            <a:endParaRPr lang="en-US" sz="2100" dirty="0"/>
+          </a:p>
+        </p:txBody>
+      </p:sp>
+      <p:sp>
+        <p:nvSpPr>
+          <p:cNvPr id="23" name="Text 19"/>
+          <p:cNvSpPr/>
+          <p:nvPr/>
+        </p:nvSpPr>
+        <p:spPr>
+          <a:xfrm>
+            <a:off x="5029200" y="5532120"/>
+            <a:ext cx="2194560" cy="274320"/>
+          </a:xfrm>
+          <a:prstGeom prst="rect">
+            <a:avLst/>
+          </a:prstGeom>
+          <a:noFill/>
+          <a:ln/>
+        </p:spPr>
+        <p:txBody>
+          <a:bodyPr wrap="square" lIns="0" tIns="0" rIns="0" bIns="0" rtlCol="0" anchor="ctr"/>
+          <a:lstStyle/>
+          <a:p>
+            <a:pPr marL="0" indent="0">
+              <a:buNone/>
+            </a:pPr>
+            <a:r>
+              <a:rPr lang="en-US" sz="950" dirty="0">
+                <a:solidFill>
+                  <a:srgbClr val="64748B"/>
+                </a:solidFill>
+                <a:latin typeface="Calibri" pitchFamily="34" charset="0"/>
+                <a:ea typeface="Calibri" pitchFamily="34" charset="-122"/>
+                <a:cs typeface="Calibri" pitchFamily="34" charset="-120"/>
+              </a:rPr>
+              <a:t>ERP / BP / Combined %</a:t>
+            </a:r>
+            <a:endParaRPr lang="en-US" sz="950" dirty="0"/>
+          </a:p>
+        </p:txBody>
+      </p:sp>
+      <p:sp>
+        <p:nvSpPr>
+          <p:cNvPr id="24" name="Text 20"/>
+          <p:cNvSpPr/>
+          <p:nvPr/>
+        </p:nvSpPr>
+        <p:spPr>
+          <a:xfrm>
+            <a:off x="7360920" y="4828032"/>
+            <a:ext cx="2194560" cy="274320"/>
+          </a:xfrm>
+          <a:prstGeom prst="rect">
+            <a:avLst/>
+          </a:prstGeom>
+          <a:noFill/>
+          <a:ln/>
+        </p:spPr>
+        <p:txBody>
+          <a:bodyPr wrap="square" lIns="0" tIns="0" rIns="0" bIns="0" rtlCol="0" anchor="ctr"/>
+          <a:lstStyle/>
+          <a:p>
+            <a:pPr marL="0" indent="0">
+              <a:buNone/>
+            </a:pPr>
+            <a:r>
+              <a:rPr lang="en-US" sz="1100" b="1" dirty="0">
+                <a:solidFill>
+                  <a:srgbClr val="64748B"/>
+                </a:solidFill>
+                <a:latin typeface="Calibri" pitchFamily="34" charset="0"/>
+                <a:ea typeface="Calibri" pitchFamily="34" charset="-122"/>
+                <a:cs typeface="Calibri" pitchFamily="34" charset="-120"/>
+              </a:rPr>
+              <a:t>Within-subject</a:t>
+            </a:r>
+            <a:endParaRPr lang="en-US" sz="1100" dirty="0"/>
+          </a:p>
+        </p:txBody>
+      </p:sp>
+      <p:sp>
+        <p:nvSpPr>
+          <p:cNvPr id="25" name="Text 21"/>
+          <p:cNvSpPr/>
+          <p:nvPr/>
+        </p:nvSpPr>
+        <p:spPr>
+          <a:xfrm>
+            <a:off x="7360920" y="5074920"/>
+            <a:ext cx="2194560" cy="457200"/>
+          </a:xfrm>
+          <a:prstGeom prst="rect">
+            <a:avLst/>
+          </a:prstGeom>
+          <a:noFill/>
+          <a:ln/>
+        </p:spPr>
+        <p:txBody>
+          <a:bodyPr wrap="square" lIns="0" tIns="0" rIns="0" bIns="0" rtlCol="0" anchor="ctr"/>
+          <a:lstStyle/>
+          <a:p>
+            <a:pPr marL="0" indent="0">
+              <a:buNone/>
+            </a:pPr>
+            <a:r>
+              <a:rPr lang="en-US" sz="2100" b="1" dirty="0">
+                <a:solidFill>
+                  <a:srgbClr val="21295C"/>
+                </a:solidFill>
+                <a:latin typeface="Cambria" pitchFamily="34" charset="0"/>
+                <a:ea typeface="Cambria" pitchFamily="34" charset="-122"/>
+                <a:cs typeface="Cambria" pitchFamily="34" charset="-120"/>
+              </a:rPr>
+              <a:t>50.8 / 58.0 / 61.6</a:t>
+            </a:r>
+            <a:endParaRPr lang="en-US" sz="2100" dirty="0"/>
+          </a:p>
+        </p:txBody>
+      </p:sp>
+      <p:sp>
+        <p:nvSpPr>
+          <p:cNvPr id="26" name="Text 22"/>
+          <p:cNvSpPr/>
+          <p:nvPr/>
+        </p:nvSpPr>
+        <p:spPr>
+          <a:xfrm>
+            <a:off x="7360920" y="5532120"/>
+            <a:ext cx="2194560" cy="274320"/>
+          </a:xfrm>
+          <a:prstGeom prst="rect">
+            <a:avLst/>
+          </a:prstGeom>
+          <a:noFill/>
+          <a:ln/>
+        </p:spPr>
+        <p:txBody>
+          <a:bodyPr wrap="square" lIns="0" tIns="0" rIns="0" bIns="0" rtlCol="0" anchor="ctr"/>
+          <a:lstStyle/>
+          <a:p>
+            <a:pPr marL="0" indent="0">
+              <a:buNone/>
+            </a:pPr>
+            <a:r>
+              <a:rPr lang="en-US" sz="950" dirty="0">
+                <a:solidFill>
+                  <a:srgbClr val="64748B"/>
+                </a:solidFill>
+                <a:latin typeface="Calibri" pitchFamily="34" charset="0"/>
+                <a:ea typeface="Calibri" pitchFamily="34" charset="-122"/>
+                <a:cs typeface="Calibri" pitchFamily="34" charset="-120"/>
+              </a:rPr>
+              <a:t>ERP / BP / Combined %</a:t>
+            </a:r>
+            <a:endParaRPr lang="en-US" sz="950" dirty="0"/>
+          </a:p>
+        </p:txBody>
+      </p:sp>
+      <p:sp>
+        <p:nvSpPr>
+          <p:cNvPr id="27" name="Text 23"/>
+          <p:cNvSpPr/>
+          <p:nvPr/>
+        </p:nvSpPr>
+        <p:spPr>
+          <a:xfrm>
+            <a:off x="9646920" y="4846320"/>
+            <a:ext cx="1828800" cy="1280160"/>
+          </a:xfrm>
+          <a:prstGeom prst="rect">
+            <a:avLst/>
+          </a:prstGeom>
+          <a:noFill/>
+          <a:ln/>
+        </p:spPr>
+        <p:txBody>
+          <a:bodyPr wrap="square" lIns="0" tIns="0" rIns="0" bIns="0" rtlCol="0" anchor="t"/>
+          <a:lstStyle/>
+          <a:p>
+            <a:pPr marL="0" indent="0">
+              <a:lnSpc>
+                <a:spcPct val="105000"/>
+              </a:lnSpc>
+              <a:buNone/>
+            </a:pPr>
+            <a:r>
+              <a:rPr lang="en-US" sz="950" b="1" dirty="0">
+                <a:solidFill>
+                  <a:srgbClr val="1E293B"/>
+                </a:solidFill>
+                <a:latin typeface="Calibri" pitchFamily="34" charset="0"/>
+                <a:ea typeface="Calibri" pitchFamily="34" charset="-122"/>
+                <a:cs typeface="Calibri" pitchFamily="34" charset="-120"/>
+              </a:rPr>
+              <a:t>Combined still best. </a:t>
+            </a:r>
+            <a:r>
+              <a:rPr lang="en-US" sz="950" dirty="0">
+                <a:solidFill>
+                  <a:srgbClr val="64748B"/>
+                </a:solidFill>
+                <a:latin typeface="Calibri" pitchFamily="34" charset="0"/>
+                <a:ea typeface="Calibri" pitchFamily="34" charset="-122"/>
+                <a:cs typeface="Calibri" pitchFamily="34" charset="-120"/>
+              </a:rPr>
+              <a:t>Cross-subject the extra class costs ~13 pts vs 3-class; the min↔medium overlap is the ceiling.</a:t>
+            </a:r>
+            <a:endParaRPr lang="en-US" sz="950" dirty="0"/>
+          </a:p>
+        </p:txBody>
+      </p:sp>
       <p:pic>
         <p:nvPicPr>
-          <p:cNvPr id="18" name="Image 1" descr="assets/erp_sep.png"/>
+          <p:cNvPr id="33" name="Picture 32">
+            <a:extLst>
+              <a:ext uri="{FF2B5EF4-FFF2-40B4-BE49-F238E27FC236}">
+                <a16:creationId xmlns:a16="http://schemas.microsoft.com/office/drawing/2014/main" id="{8F57F892-7DC9-8DB9-2621-2FDA6A2CA4A6}"/>
+              </a:ext>
+            </a:extLst>
+          </p:cNvPr>
           <p:cNvPicPr>
             <a:picLocks noChangeAspect="1"/>
           </p:cNvPicPr>
@@ -8554,376 +8880,44 @@
         </p:blipFill>
         <p:spPr>
           <a:xfrm>
-            <a:off x="8732520" y="1970532"/>
-            <a:ext cx="2743200" cy="1691640"/>
+            <a:off x="9288084" y="1814958"/>
+            <a:ext cx="1759311" cy="1052921"/>
           </a:xfrm>
           <a:prstGeom prst="rect">
             <a:avLst/>
           </a:prstGeom>
         </p:spPr>
       </p:pic>
-      <p:sp>
-        <p:nvSpPr>
-          <p:cNvPr id="19" name="Text 15"/>
-          <p:cNvSpPr/>
-          <p:nvPr/>
-        </p:nvSpPr>
-        <p:spPr>
-          <a:xfrm>
-            <a:off x="8732520" y="3557524"/>
-            <a:ext cx="2788920" cy="457200"/>
-          </a:xfrm>
-          <a:prstGeom prst="rect">
-            <a:avLst/>
-          </a:prstGeom>
-          <a:noFill/>
-          <a:ln/>
-        </p:spPr>
-        <p:txBody>
-          <a:bodyPr wrap="square" lIns="0" tIns="0" rIns="0" bIns="0" rtlCol="0" anchor="ctr"/>
-          <a:lstStyle/>
-          <a:p>
-            <a:pPr marL="0" indent="0" algn="ctr">
-              <a:buNone/>
-            </a:pPr>
-            <a:r>
-              <a:rPr lang="en-US" sz="900" i="1" dirty="0">
-                <a:solidFill>
-                  <a:srgbClr val="64748B"/>
-                </a:solidFill>
-                <a:latin typeface="Calibri" pitchFamily="34" charset="0"/>
-                <a:ea typeface="Calibri" pitchFamily="34" charset="-122"/>
-                <a:cs typeface="Calibri" pitchFamily="34" charset="-120"/>
-              </a:rPr>
-              <a:t>Evoked SEP grows with intensity — the ERP feature</a:t>
-            </a:r>
-            <a:endParaRPr lang="en-US" sz="900" dirty="0"/>
-          </a:p>
-        </p:txBody>
-      </p:sp>
-      <p:sp>
-        <p:nvSpPr>
-          <p:cNvPr id="20" name="Shape 16"/>
-          <p:cNvSpPr/>
-          <p:nvPr/>
-        </p:nvSpPr>
-        <p:spPr>
-          <a:xfrm>
-            <a:off x="4800600" y="4663440"/>
-            <a:ext cx="6812280" cy="1627632"/>
-          </a:xfrm>
-          <a:prstGeom prst="roundRect">
-            <a:avLst>
-              <a:gd name="adj" fmla="val 4494"/>
-            </a:avLst>
-          </a:prstGeom>
-          <a:solidFill>
-            <a:srgbClr val="FFFFFF"/>
-          </a:solidFill>
-          <a:ln/>
-          <a:effectLst>
-            <a:outerShdw blurRad="88900" dist="38100" dir="5400000" algn="bl" rotWithShape="0">
-              <a:srgbClr val="000000">
-                <a:alpha val="13000"/>
-              </a:srgbClr>
-            </a:outerShdw>
-          </a:effectLst>
-        </p:spPr>
-        <p:txBody>
-          <a:bodyPr/>
-          <a:lstStyle/>
-          <a:p>
-            <a:endParaRPr lang="en-US"/>
-          </a:p>
-        </p:txBody>
-      </p:sp>
-      <p:sp>
-        <p:nvSpPr>
-          <p:cNvPr id="21" name="Text 17"/>
-          <p:cNvSpPr/>
-          <p:nvPr/>
-        </p:nvSpPr>
-        <p:spPr>
-          <a:xfrm>
-            <a:off x="5029200" y="4828032"/>
-            <a:ext cx="2194560" cy="274320"/>
-          </a:xfrm>
-          <a:prstGeom prst="rect">
-            <a:avLst/>
-          </a:prstGeom>
-          <a:noFill/>
-          <a:ln/>
-        </p:spPr>
-        <p:txBody>
-          <a:bodyPr wrap="square" lIns="0" tIns="0" rIns="0" bIns="0" rtlCol="0" anchor="ctr"/>
-          <a:lstStyle/>
-          <a:p>
-            <a:pPr marL="0" indent="0">
-              <a:buNone/>
-            </a:pPr>
-            <a:r>
-              <a:rPr lang="en-US" sz="1100" b="1" dirty="0">
-                <a:solidFill>
-                  <a:srgbClr val="64748B"/>
-                </a:solidFill>
-                <a:latin typeface="Calibri" pitchFamily="34" charset="0"/>
-                <a:ea typeface="Calibri" pitchFamily="34" charset="-122"/>
-                <a:cs typeface="Calibri" pitchFamily="34" charset="-120"/>
-              </a:rPr>
-              <a:t>LOSO (cross-subject)</a:t>
-            </a:r>
-            <a:endParaRPr lang="en-US" sz="1100" dirty="0"/>
-          </a:p>
-        </p:txBody>
-      </p:sp>
-      <p:sp>
-        <p:nvSpPr>
-          <p:cNvPr id="22" name="Text 18"/>
-          <p:cNvSpPr/>
-          <p:nvPr/>
-        </p:nvSpPr>
-        <p:spPr>
-          <a:xfrm>
-            <a:off x="5029200" y="5074920"/>
-            <a:ext cx="2194560" cy="457200"/>
-          </a:xfrm>
-          <a:prstGeom prst="rect">
-            <a:avLst/>
-          </a:prstGeom>
-          <a:noFill/>
-          <a:ln/>
-        </p:spPr>
-        <p:txBody>
-          <a:bodyPr wrap="square" lIns="0" tIns="0" rIns="0" bIns="0" rtlCol="0" anchor="ctr"/>
-          <a:lstStyle/>
-          <a:p>
-            <a:pPr marL="0" indent="0">
-              <a:buNone/>
-            </a:pPr>
-            <a:r>
-              <a:rPr lang="en-US" sz="2100" b="1" dirty="0">
-                <a:solidFill>
-                  <a:srgbClr val="1C7293"/>
-                </a:solidFill>
-                <a:latin typeface="Cambria" pitchFamily="34" charset="0"/>
-                <a:ea typeface="Cambria" pitchFamily="34" charset="-122"/>
-                <a:cs typeface="Cambria" pitchFamily="34" charset="-120"/>
-              </a:rPr>
-              <a:t>44.8 / 44.2 / 48.7</a:t>
-            </a:r>
-            <a:endParaRPr lang="en-US" sz="2100" dirty="0"/>
-          </a:p>
-        </p:txBody>
-      </p:sp>
-      <p:sp>
-        <p:nvSpPr>
-          <p:cNvPr id="23" name="Text 19"/>
-          <p:cNvSpPr/>
-          <p:nvPr/>
-        </p:nvSpPr>
-        <p:spPr>
-          <a:xfrm>
-            <a:off x="5029200" y="5532120"/>
-            <a:ext cx="2194560" cy="274320"/>
-          </a:xfrm>
-          <a:prstGeom prst="rect">
-            <a:avLst/>
-          </a:prstGeom>
-          <a:noFill/>
-          <a:ln/>
-        </p:spPr>
-        <p:txBody>
-          <a:bodyPr wrap="square" lIns="0" tIns="0" rIns="0" bIns="0" rtlCol="0" anchor="ctr"/>
-          <a:lstStyle/>
-          <a:p>
-            <a:pPr marL="0" indent="0">
-              <a:buNone/>
-            </a:pPr>
-            <a:r>
-              <a:rPr lang="en-US" sz="950" dirty="0">
-                <a:solidFill>
-                  <a:srgbClr val="64748B"/>
-                </a:solidFill>
-                <a:latin typeface="Calibri" pitchFamily="34" charset="0"/>
-                <a:ea typeface="Calibri" pitchFamily="34" charset="-122"/>
-                <a:cs typeface="Calibri" pitchFamily="34" charset="-120"/>
-              </a:rPr>
-              <a:t>ERP / BP / Combined %</a:t>
-            </a:r>
-            <a:endParaRPr lang="en-US" sz="950" dirty="0"/>
-          </a:p>
-        </p:txBody>
-      </p:sp>
-      <p:sp>
-        <p:nvSpPr>
-          <p:cNvPr id="24" name="Text 20"/>
-          <p:cNvSpPr/>
-          <p:nvPr/>
-        </p:nvSpPr>
-        <p:spPr>
-          <a:xfrm>
-            <a:off x="7360920" y="4828032"/>
-            <a:ext cx="2194560" cy="274320"/>
-          </a:xfrm>
-          <a:prstGeom prst="rect">
-            <a:avLst/>
-          </a:prstGeom>
-          <a:noFill/>
-          <a:ln/>
-        </p:spPr>
-        <p:txBody>
-          <a:bodyPr wrap="square" lIns="0" tIns="0" rIns="0" bIns="0" rtlCol="0" anchor="ctr"/>
-          <a:lstStyle/>
-          <a:p>
-            <a:pPr marL="0" indent="0">
-              <a:buNone/>
-            </a:pPr>
-            <a:r>
-              <a:rPr lang="en-US" sz="1100" b="1" dirty="0">
-                <a:solidFill>
-                  <a:srgbClr val="64748B"/>
-                </a:solidFill>
-                <a:latin typeface="Calibri" pitchFamily="34" charset="0"/>
-                <a:ea typeface="Calibri" pitchFamily="34" charset="-122"/>
-                <a:cs typeface="Calibri" pitchFamily="34" charset="-120"/>
-              </a:rPr>
-              <a:t>Within-subject</a:t>
-            </a:r>
-            <a:endParaRPr lang="en-US" sz="1100" dirty="0"/>
-          </a:p>
-        </p:txBody>
-      </p:sp>
-      <p:sp>
-        <p:nvSpPr>
-          <p:cNvPr id="25" name="Text 21"/>
-          <p:cNvSpPr/>
-          <p:nvPr/>
-        </p:nvSpPr>
-        <p:spPr>
-          <a:xfrm>
-            <a:off x="7360920" y="5074920"/>
-            <a:ext cx="2194560" cy="457200"/>
-          </a:xfrm>
-          <a:prstGeom prst="rect">
-            <a:avLst/>
-          </a:prstGeom>
-          <a:noFill/>
-          <a:ln/>
-        </p:spPr>
-        <p:txBody>
-          <a:bodyPr wrap="square" lIns="0" tIns="0" rIns="0" bIns="0" rtlCol="0" anchor="ctr"/>
-          <a:lstStyle/>
-          <a:p>
-            <a:pPr marL="0" indent="0">
-              <a:buNone/>
-            </a:pPr>
-            <a:r>
-              <a:rPr lang="en-US" sz="2100" b="1" dirty="0">
-                <a:solidFill>
-                  <a:srgbClr val="21295C"/>
-                </a:solidFill>
-                <a:latin typeface="Cambria" pitchFamily="34" charset="0"/>
-                <a:ea typeface="Cambria" pitchFamily="34" charset="-122"/>
-                <a:cs typeface="Cambria" pitchFamily="34" charset="-120"/>
-              </a:rPr>
-              <a:t>50.8 / 58.0 / 61.6</a:t>
-            </a:r>
-            <a:endParaRPr lang="en-US" sz="2100" dirty="0"/>
-          </a:p>
-        </p:txBody>
-      </p:sp>
-      <p:sp>
-        <p:nvSpPr>
-          <p:cNvPr id="26" name="Text 22"/>
-          <p:cNvSpPr/>
-          <p:nvPr/>
-        </p:nvSpPr>
-        <p:spPr>
-          <a:xfrm>
-            <a:off x="7360920" y="5532120"/>
-            <a:ext cx="2194560" cy="274320"/>
-          </a:xfrm>
-          <a:prstGeom prst="rect">
-            <a:avLst/>
-          </a:prstGeom>
-          <a:noFill/>
-          <a:ln/>
-        </p:spPr>
-        <p:txBody>
-          <a:bodyPr wrap="square" lIns="0" tIns="0" rIns="0" bIns="0" rtlCol="0" anchor="ctr"/>
-          <a:lstStyle/>
-          <a:p>
-            <a:pPr marL="0" indent="0">
-              <a:buNone/>
-            </a:pPr>
-            <a:r>
-              <a:rPr lang="en-US" sz="950" dirty="0">
-                <a:solidFill>
-                  <a:srgbClr val="64748B"/>
-                </a:solidFill>
-                <a:latin typeface="Calibri" pitchFamily="34" charset="0"/>
-                <a:ea typeface="Calibri" pitchFamily="34" charset="-122"/>
-                <a:cs typeface="Calibri" pitchFamily="34" charset="-120"/>
-              </a:rPr>
-              <a:t>ERP / BP / Combined %</a:t>
-            </a:r>
-            <a:endParaRPr lang="en-US" sz="950" dirty="0"/>
-          </a:p>
-        </p:txBody>
-      </p:sp>
-      <p:sp>
-        <p:nvSpPr>
-          <p:cNvPr id="27" name="Text 23"/>
-          <p:cNvSpPr/>
-          <p:nvPr/>
-        </p:nvSpPr>
-        <p:spPr>
-          <a:xfrm>
-            <a:off x="9646920" y="4846320"/>
-            <a:ext cx="1828800" cy="1280160"/>
-          </a:xfrm>
-          <a:prstGeom prst="rect">
-            <a:avLst/>
-          </a:prstGeom>
-          <a:noFill/>
-          <a:ln/>
-        </p:spPr>
-        <p:txBody>
-          <a:bodyPr wrap="square" lIns="0" tIns="0" rIns="0" bIns="0" rtlCol="0" anchor="t"/>
-          <a:lstStyle/>
-          <a:p>
-            <a:pPr marL="0" indent="0">
-              <a:lnSpc>
-                <a:spcPct val="105000"/>
-              </a:lnSpc>
-              <a:buNone/>
-            </a:pPr>
-            <a:r>
-              <a:rPr lang="en-US" sz="950" b="1" dirty="0">
-                <a:solidFill>
-                  <a:srgbClr val="1E293B"/>
-                </a:solidFill>
-                <a:latin typeface="Calibri" pitchFamily="34" charset="0"/>
-                <a:ea typeface="Calibri" pitchFamily="34" charset="-122"/>
-                <a:cs typeface="Calibri" pitchFamily="34" charset="-120"/>
-              </a:rPr>
-              <a:t>Combined still best. </a:t>
-            </a:r>
-            <a:r>
-              <a:rPr lang="en-US" sz="950" dirty="0">
-                <a:solidFill>
-                  <a:srgbClr val="64748B"/>
-                </a:solidFill>
-                <a:latin typeface="Calibri" pitchFamily="34" charset="0"/>
-                <a:ea typeface="Calibri" pitchFamily="34" charset="-122"/>
-                <a:cs typeface="Calibri" pitchFamily="34" charset="-120"/>
-              </a:rPr>
-              <a:t>Cross-subject the extra class costs ~13 pts vs 3-class; the min↔medium overlap is the ceiling.</a:t>
-            </a:r>
-            <a:endParaRPr lang="en-US" sz="950" dirty="0"/>
-          </a:p>
-        </p:txBody>
-      </p:sp>
+      <p:pic>
+        <p:nvPicPr>
+          <p:cNvPr id="35" name="Picture 34">
+            <a:extLst>
+              <a:ext uri="{FF2B5EF4-FFF2-40B4-BE49-F238E27FC236}">
+                <a16:creationId xmlns:a16="http://schemas.microsoft.com/office/drawing/2014/main" id="{D4BAF696-915C-7862-A0F4-354F3DE7E91E}"/>
+              </a:ext>
+            </a:extLst>
+          </p:cNvPr>
+          <p:cNvPicPr>
+            <a:picLocks noChangeAspect="1"/>
+          </p:cNvPicPr>
+          <p:nvPr/>
+        </p:nvPicPr>
+        <p:blipFill>
+          <a:blip r:embed="rId5"/>
+          <a:stretch>
+            <a:fillRect/>
+          </a:stretch>
+        </p:blipFill>
+        <p:spPr>
+          <a:xfrm>
+            <a:off x="9293043" y="2864911"/>
+            <a:ext cx="1759311" cy="1306917"/>
+          </a:xfrm>
+          <a:prstGeom prst="rect">
+            <a:avLst/>
+          </a:prstGeom>
+        </p:spPr>
+      </p:pic>
     </p:spTree>
   </p:cSld>
   <p:clrMapOvr>
